--- a/site/clases/parte-1-machine-learning-clasico/078-svm-no-lineal-kernel-polinomial-rbf/clase-078-svm-no-lineal-kernel-polinomial-rbf-presentacion.pptx
+++ b/site/clases/parte-1-machine-learning-clasico/078-svm-no-lineal-kernel-polinomial-rbf/clase-078-svm-no-lineal-kernel-polinomial-rbf-presentacion.pptx
@@ -3272,7 +3272,7 @@
                 </a:solidFill>
                 <a:latin typeface="Segoe UI"/>
               </a:rPr>
-              <a:t>Parte: 1 — Machine Learning Clásico · Fuente: Géron, cap. 5.  Duración estimada: 70 min.</a:t>
+              <a:t>Parte: 1 — Machine Learning Clásico · Fuente: Géron, cap. 5.  Duración estimada: 70 min. · Nivel: Intermedio</a:t>
             </a:r>
           </a:p>
         </p:txBody>
@@ -3581,7 +3581,7 @@
                 </a:solidFill>
                 <a:latin typeface="Segoe UI"/>
               </a:rPr>
-              <a:t>Parte: 1 — Machine Learning Clásico · Fuente: Géron, cap. 5.  Duración estimada: 70 min.</a:t>
+              <a:t>Parte: 1 — Machine Learning Clásico · Fuente: Géron, cap. 5.  Duración estimada: 70 min. · Nivel: Intermedio</a:t>
             </a:r>
           </a:p>
         </p:txBody>
@@ -4933,7 +4933,7 @@
                 </a:solidFill>
                 <a:latin typeface="Segoe UI"/>
               </a:rPr>
-              <a:t>Primer bloque ejecutable del notebook.</a:t>
+              <a:t>make_moons genera dos medialunas entrelazadas; make_circles, dos anillos concéntricos. Ninguno es separable con una recta.</a:t>
             </a:r>
           </a:p>
         </p:txBody>
@@ -5020,7 +5020,387 @@
                 </a:solidFill>
                 <a:latin typeface="Courier New"/>
               </a:rPr>
-              <a:t># Imports y configuración inicial</a:t>
+              <a:t>import numpy as np</a:t>
+            </a:r>
+          </a:p>
+          <a:p>
+            <a:pPr>
+              <a:defRPr sz="1200" b="0">
+                <a:solidFill>
+                  <a:srgbClr val="F8FAFC"/>
+                </a:solidFill>
+                <a:latin typeface="Courier New"/>
+              </a:defRPr>
+            </a:pPr>
+            <a:r>
+              <a:rPr sz="1200" b="0">
+                <a:solidFill>
+                  <a:srgbClr val="F8FAFC"/>
+                </a:solidFill>
+                <a:latin typeface="Courier New"/>
+              </a:rPr>
+              <a:t>import matplotlib.pyplot as plt</a:t>
+            </a:r>
+          </a:p>
+          <a:p>
+            <a:pPr>
+              <a:defRPr sz="1200" b="0">
+                <a:solidFill>
+                  <a:srgbClr val="F8FAFC"/>
+                </a:solidFill>
+                <a:latin typeface="Courier New"/>
+              </a:defRPr>
+            </a:pPr>
+            <a:r>
+              <a:rPr sz="1200" b="0">
+                <a:solidFill>
+                  <a:srgbClr val="F8FAFC"/>
+                </a:solidFill>
+                <a:latin typeface="Courier New"/>
+              </a:rPr>
+              <a:t>from sklearn.datasets import make_moons, make_circles</a:t>
+            </a:r>
+          </a:p>
+          <a:p>
+            <a:pPr>
+              <a:defRPr sz="1200" b="0">
+                <a:solidFill>
+                  <a:srgbClr val="F8FAFC"/>
+                </a:solidFill>
+                <a:latin typeface="Courier New"/>
+              </a:defRPr>
+            </a:pPr>
+            <a:r>
+              <a:rPr sz="1200" b="0">
+                <a:solidFill>
+                  <a:srgbClr val="F8FAFC"/>
+                </a:solidFill>
+                <a:latin typeface="Courier New"/>
+              </a:rPr>
+              <a:t>from sklearn.svm import SVC</a:t>
+            </a:r>
+          </a:p>
+          <a:p>
+            <a:pPr>
+              <a:defRPr sz="1200" b="0">
+                <a:solidFill>
+                  <a:srgbClr val="F8FAFC"/>
+                </a:solidFill>
+                <a:latin typeface="Courier New"/>
+              </a:defRPr>
+            </a:pPr>
+            <a:r>
+              <a:rPr sz="1200" b="0">
+                <a:solidFill>
+                  <a:srgbClr val="F8FAFC"/>
+                </a:solidFill>
+                <a:latin typeface="Courier New"/>
+              </a:rPr>
+              <a:t>from sklearn.preprocessing import StandardScaler</a:t>
+            </a:r>
+          </a:p>
+          <a:p>
+            <a:pPr>
+              <a:defRPr sz="1200" b="0">
+                <a:solidFill>
+                  <a:srgbClr val="F8FAFC"/>
+                </a:solidFill>
+                <a:latin typeface="Courier New"/>
+              </a:defRPr>
+            </a:pPr>
+            <a:r>
+              <a:rPr sz="1200" b="0">
+                <a:solidFill>
+                  <a:srgbClr val="F8FAFC"/>
+                </a:solidFill>
+                <a:latin typeface="Courier New"/>
+              </a:rPr>
+              <a:t>from sklearn.pipeline import make_pipeline</a:t>
+            </a:r>
+          </a:p>
+          <a:p>
+            <a:pPr>
+              <a:defRPr sz="1200" b="0">
+                <a:solidFill>
+                  <a:srgbClr val="F8FAFC"/>
+                </a:solidFill>
+                <a:latin typeface="Courier New"/>
+              </a:defRPr>
+            </a:pPr>
+            <a:r>
+              <a:rPr sz="1200" b="0">
+                <a:solidFill>
+                  <a:srgbClr val="F8FAFC"/>
+                </a:solidFill>
+                <a:latin typeface="Courier New"/>
+              </a:rPr>
+              <a:t>from sklearn.model_selection import train_test_split, GridSearchCV</a:t>
+            </a:r>
+          </a:p>
+          <a:p>
+            <a:pPr>
+              <a:defRPr sz="1200" b="0">
+                <a:solidFill>
+                  <a:srgbClr val="F8FAFC"/>
+                </a:solidFill>
+                <a:latin typeface="Courier New"/>
+              </a:defRPr>
+            </a:pPr>
+            <a:r>
+              <a:rPr sz="1200" b="0">
+                <a:solidFill>
+                  <a:srgbClr val="F8FAFC"/>
+                </a:solidFill>
+                <a:latin typeface="Courier New"/>
+              </a:rPr>
+              <a:t>from sklearn.metrics import accuracy_score</a:t>
+            </a:r>
+          </a:p>
+          <a:p>
+            <a:pPr>
+              <a:defRPr sz="1200" b="0">
+                <a:solidFill>
+                  <a:srgbClr val="F8FAFC"/>
+                </a:solidFill>
+                <a:latin typeface="Courier New"/>
+              </a:defRPr>
+            </a:pPr>
+            <a:r>
+              <a:rPr sz="1200" b="0">
+                <a:solidFill>
+                  <a:srgbClr val="F8FAFC"/>
+                </a:solidFill>
+                <a:latin typeface="Courier New"/>
+              </a:rPr>
+              <a:t> </a:t>
+            </a:r>
+          </a:p>
+          <a:p>
+            <a:pPr>
+              <a:defRPr sz="1200" b="0">
+                <a:solidFill>
+                  <a:srgbClr val="F8FAFC"/>
+                </a:solidFill>
+                <a:latin typeface="Courier New"/>
+              </a:defRPr>
+            </a:pPr>
+            <a:r>
+              <a:rPr sz="1200" b="0">
+                <a:solidFill>
+                  <a:srgbClr val="F8FAFC"/>
+                </a:solidFill>
+                <a:latin typeface="Courier New"/>
+              </a:rPr>
+              <a:t>RND = 42</a:t>
+            </a:r>
+          </a:p>
+          <a:p>
+            <a:pPr>
+              <a:defRPr sz="1200" b="0">
+                <a:solidFill>
+                  <a:srgbClr val="F8FAFC"/>
+                </a:solidFill>
+                <a:latin typeface="Courier New"/>
+              </a:defRPr>
+            </a:pPr>
+            <a:r>
+              <a:rPr sz="1200" b="0">
+                <a:solidFill>
+                  <a:srgbClr val="F8FAFC"/>
+                </a:solidFill>
+                <a:latin typeface="Courier New"/>
+              </a:rPr>
+              <a:t>np.random.seed(RND)</a:t>
+            </a:r>
+          </a:p>
+          <a:p>
+            <a:pPr>
+              <a:defRPr sz="1200" b="0">
+                <a:solidFill>
+                  <a:srgbClr val="F8FAFC"/>
+                </a:solidFill>
+                <a:latin typeface="Courier New"/>
+              </a:defRPr>
+            </a:pPr>
+            <a:r>
+              <a:rPr sz="1200" b="0">
+                <a:solidFill>
+                  <a:srgbClr val="F8FAFC"/>
+                </a:solidFill>
+                <a:latin typeface="Courier New"/>
+              </a:rPr>
+              <a:t>Xm, ym = make_moons(n_samples=300, noise=0.20, random_state=RND)</a:t>
+            </a:r>
+          </a:p>
+          <a:p>
+            <a:pPr>
+              <a:defRPr sz="1200" b="0">
+                <a:solidFill>
+                  <a:srgbClr val="F8FAFC"/>
+                </a:solidFill>
+                <a:latin typeface="Courier New"/>
+              </a:defRPr>
+            </a:pPr>
+            <a:r>
+              <a:rPr sz="1200" b="0">
+                <a:solidFill>
+                  <a:srgbClr val="F8FAFC"/>
+                </a:solidFill>
+                <a:latin typeface="Courier New"/>
+              </a:rPr>
+              <a:t>Xc, yc = make_circles(n_samples=300, noise=0.10, factor=0.4, random_state=RND)</a:t>
+            </a:r>
+          </a:p>
+          <a:p>
+            <a:pPr>
+              <a:defRPr sz="1200" b="0">
+                <a:solidFill>
+                  <a:srgbClr val="F8FAFC"/>
+                </a:solidFill>
+                <a:latin typeface="Courier New"/>
+              </a:defRPr>
+            </a:pPr>
+            <a:r>
+              <a:rPr sz="1200" b="0">
+                <a:solidFill>
+                  <a:srgbClr val="F8FAFC"/>
+                </a:solidFill>
+                <a:latin typeface="Courier New"/>
+              </a:rPr>
+              <a:t> </a:t>
+            </a:r>
+          </a:p>
+          <a:p>
+            <a:pPr>
+              <a:defRPr sz="1200" b="0">
+                <a:solidFill>
+                  <a:srgbClr val="F8FAFC"/>
+                </a:solidFill>
+                <a:latin typeface="Courier New"/>
+              </a:defRPr>
+            </a:pPr>
+            <a:r>
+              <a:rPr sz="1200" b="0">
+                <a:solidFill>
+                  <a:srgbClr val="F8FAFC"/>
+                </a:solidFill>
+                <a:latin typeface="Courier New"/>
+              </a:rPr>
+              <a:t>def plot_boundary(ax, model, X, y, title):</a:t>
+            </a:r>
+          </a:p>
+          <a:p>
+            <a:pPr>
+              <a:defRPr sz="1200" b="0">
+                <a:solidFill>
+                  <a:srgbClr val="F8FAFC"/>
+                </a:solidFill>
+                <a:latin typeface="Courier New"/>
+              </a:defRPr>
+            </a:pPr>
+            <a:r>
+              <a:rPr sz="1200" b="0">
+                <a:solidFill>
+                  <a:srgbClr val="F8FAFC"/>
+                </a:solidFill>
+                <a:latin typeface="Courier New"/>
+              </a:rPr>
+              <a:t>    h = 0.02</a:t>
+            </a:r>
+          </a:p>
+          <a:p>
+            <a:pPr>
+              <a:defRPr sz="1200" b="0">
+                <a:solidFill>
+                  <a:srgbClr val="F8FAFC"/>
+                </a:solidFill>
+                <a:latin typeface="Courier New"/>
+              </a:defRPr>
+            </a:pPr>
+            <a:r>
+              <a:rPr sz="1200" b="0">
+                <a:solidFill>
+                  <a:srgbClr val="F8FAFC"/>
+                </a:solidFill>
+                <a:latin typeface="Courier New"/>
+              </a:rPr>
+              <a:t>    x0 = np.linspace(X[:, 0].min() - 0.5, X[:, 0].max() + 0.5, 200)</a:t>
+            </a:r>
+          </a:p>
+          <a:p>
+            <a:pPr>
+              <a:defRPr sz="1200" b="0">
+                <a:solidFill>
+                  <a:srgbClr val="F8FAFC"/>
+                </a:solidFill>
+                <a:latin typeface="Courier New"/>
+              </a:defRPr>
+            </a:pPr>
+            <a:r>
+              <a:rPr sz="1200" b="0">
+                <a:solidFill>
+                  <a:srgbClr val="F8FAFC"/>
+                </a:solidFill>
+                <a:latin typeface="Courier New"/>
+              </a:rPr>
+              <a:t>    x1 = np.linspace(X[:, 1].min() - 0.5, X[:, 1].max() + 0.5, 200)</a:t>
+            </a:r>
+          </a:p>
+          <a:p>
+            <a:pPr>
+              <a:defRPr sz="1200" b="0">
+                <a:solidFill>
+                  <a:srgbClr val="F8FAFC"/>
+                </a:solidFill>
+                <a:latin typeface="Courier New"/>
+              </a:defRPr>
+            </a:pPr>
+            <a:r>
+              <a:rPr sz="1200" b="0">
+                <a:solidFill>
+                  <a:srgbClr val="F8FAFC"/>
+                </a:solidFill>
+                <a:latin typeface="Courier New"/>
+              </a:rPr>
+              <a:t>    xx, yy = np.meshgrid(x0, x1)</a:t>
+            </a:r>
+          </a:p>
+          <a:p>
+            <a:pPr>
+              <a:defRPr sz="1200" b="0">
+                <a:solidFill>
+                  <a:srgbClr val="F8FAFC"/>
+                </a:solidFill>
+                <a:latin typeface="Courier New"/>
+              </a:defRPr>
+            </a:pPr>
+            <a:r>
+              <a:rPr sz="1200" b="0">
+                <a:solidFill>
+                  <a:srgbClr val="F8FAFC"/>
+                </a:solidFill>
+                <a:latin typeface="Courier New"/>
+              </a:rPr>
+              <a:t>    Z = model.predict(np.c_[xx.ravel(), yy.ravel()]).reshape(xx.shape)</a:t>
+            </a:r>
+          </a:p>
+          <a:p>
+            <a:pPr>
+              <a:defRPr sz="1200" b="0">
+                <a:solidFill>
+                  <a:srgbClr val="F8FAFC"/>
+                </a:solidFill>
+                <a:latin typeface="Courier New"/>
+              </a:defRPr>
+            </a:pPr>
+            <a:r>
+              <a:rPr sz="1200" b="0">
+                <a:solidFill>
+                  <a:srgbClr val="F8FAFC"/>
+                </a:solidFill>
+                <a:latin typeface="Courier New"/>
+              </a:rPr>
+              <a:t># ... (truncado)</a:t>
             </a:r>
           </a:p>
         </p:txBody>
